--- a/p04/A-frame-moving-geometric-objects.pptx
+++ b/p04/A-frame-moving-geometric-objects.pptx
@@ -224,7 +224,7 @@
           <a:p>
             <a:fld id="{FA1E3CD0-6E24-4AC0-945A-82AEC1490673}" type="datetimeFigureOut">
               <a:rPr lang="en-US" smtClean="0"/>
-              <a:t>1/6/2026</a:t>
+              <a:t>5/20/2026</a:t>
             </a:fld>
             <a:endParaRPr lang="en-US"/>
           </a:p>
@@ -706,7 +706,7 @@
           <a:p>
             <a:fld id="{846CE7D5-CF57-46EF-B807-FDD0502418D4}" type="datetimeFigureOut">
               <a:rPr lang="en-US" smtClean="0"/>
-              <a:t>1/6/2026</a:t>
+              <a:t>5/20/2026</a:t>
             </a:fld>
             <a:endParaRPr lang="en-US"/>
           </a:p>
@@ -876,7 +876,7 @@
           <a:p>
             <a:fld id="{846CE7D5-CF57-46EF-B807-FDD0502418D4}" type="datetimeFigureOut">
               <a:rPr lang="en-US" smtClean="0"/>
-              <a:t>1/6/2026</a:t>
+              <a:t>5/20/2026</a:t>
             </a:fld>
             <a:endParaRPr lang="en-US"/>
           </a:p>
@@ -1056,7 +1056,7 @@
           <a:p>
             <a:fld id="{846CE7D5-CF57-46EF-B807-FDD0502418D4}" type="datetimeFigureOut">
               <a:rPr lang="en-US" smtClean="0"/>
-              <a:t>1/6/2026</a:t>
+              <a:t>5/20/2026</a:t>
             </a:fld>
             <a:endParaRPr lang="en-US"/>
           </a:p>
@@ -1226,7 +1226,7 @@
           <a:p>
             <a:fld id="{846CE7D5-CF57-46EF-B807-FDD0502418D4}" type="datetimeFigureOut">
               <a:rPr lang="en-US" smtClean="0"/>
-              <a:t>1/6/2026</a:t>
+              <a:t>5/20/2026</a:t>
             </a:fld>
             <a:endParaRPr lang="en-US"/>
           </a:p>
@@ -1472,7 +1472,7 @@
           <a:p>
             <a:fld id="{846CE7D5-CF57-46EF-B807-FDD0502418D4}" type="datetimeFigureOut">
               <a:rPr lang="en-US" smtClean="0"/>
-              <a:t>1/6/2026</a:t>
+              <a:t>5/20/2026</a:t>
             </a:fld>
             <a:endParaRPr lang="en-US"/>
           </a:p>
@@ -1704,7 +1704,7 @@
           <a:p>
             <a:fld id="{846CE7D5-CF57-46EF-B807-FDD0502418D4}" type="datetimeFigureOut">
               <a:rPr lang="en-US" smtClean="0"/>
-              <a:t>1/6/2026</a:t>
+              <a:t>5/20/2026</a:t>
             </a:fld>
             <a:endParaRPr lang="en-US"/>
           </a:p>
@@ -2071,7 +2071,7 @@
           <a:p>
             <a:fld id="{846CE7D5-CF57-46EF-B807-FDD0502418D4}" type="datetimeFigureOut">
               <a:rPr lang="en-US" smtClean="0"/>
-              <a:t>1/6/2026</a:t>
+              <a:t>5/20/2026</a:t>
             </a:fld>
             <a:endParaRPr lang="en-US"/>
           </a:p>
@@ -2189,7 +2189,7 @@
           <a:p>
             <a:fld id="{846CE7D5-CF57-46EF-B807-FDD0502418D4}" type="datetimeFigureOut">
               <a:rPr lang="en-US" smtClean="0"/>
-              <a:t>1/6/2026</a:t>
+              <a:t>5/20/2026</a:t>
             </a:fld>
             <a:endParaRPr lang="en-US"/>
           </a:p>
@@ -2284,7 +2284,7 @@
           <a:p>
             <a:fld id="{846CE7D5-CF57-46EF-B807-FDD0502418D4}" type="datetimeFigureOut">
               <a:rPr lang="en-US" smtClean="0"/>
-              <a:t>1/6/2026</a:t>
+              <a:t>5/20/2026</a:t>
             </a:fld>
             <a:endParaRPr lang="en-US"/>
           </a:p>
@@ -2561,7 +2561,7 @@
           <a:p>
             <a:fld id="{846CE7D5-CF57-46EF-B807-FDD0502418D4}" type="datetimeFigureOut">
               <a:rPr lang="en-US" smtClean="0"/>
-              <a:t>1/6/2026</a:t>
+              <a:t>5/20/2026</a:t>
             </a:fld>
             <a:endParaRPr lang="en-US"/>
           </a:p>
@@ -2818,7 +2818,7 @@
           <a:p>
             <a:fld id="{846CE7D5-CF57-46EF-B807-FDD0502418D4}" type="datetimeFigureOut">
               <a:rPr lang="en-US" smtClean="0"/>
-              <a:t>1/6/2026</a:t>
+              <a:t>5/20/2026</a:t>
             </a:fld>
             <a:endParaRPr lang="en-US"/>
           </a:p>
@@ -3031,7 +3031,7 @@
           <a:p>
             <a:fld id="{846CE7D5-CF57-46EF-B807-FDD0502418D4}" type="datetimeFigureOut">
               <a:rPr lang="en-US" smtClean="0"/>
-              <a:t>1/6/2026</a:t>
+              <a:t>5/20/2026</a:t>
             </a:fld>
             <a:endParaRPr lang="en-US"/>
           </a:p>
@@ -5425,13 +5425,13 @@
           <p:nvPr/>
         </p:nvPicPr>
         <p:blipFill>
-          <a:blip r:embed="rId5">
+          <a:blip>
             <a:extLst>
               <a:ext uri="{28A0092B-C50C-407E-A947-70E740481C1C}">
                 <a14:useLocalDpi xmlns:a14="http://schemas.microsoft.com/office/drawing/2010/main" val="0"/>
               </a:ext>
               <a:ext uri="{96DAC541-7B7A-43D3-8B79-37D633B846F1}">
-                <asvg:svgBlip xmlns:asvg="http://schemas.microsoft.com/office/drawing/2016/SVG/main" r:embed="rId6"/>
+                <asvg:svgBlip xmlns:asvg="http://schemas.microsoft.com/office/drawing/2016/SVG/main" r:embed="rId5"/>
               </a:ext>
             </a:extLst>
           </a:blip>
@@ -10133,13 +10133,13 @@
           <p:nvPr/>
         </p:nvPicPr>
         <p:blipFill>
-          <a:blip r:embed="rId7">
+          <a:blip>
             <a:extLst>
               <a:ext uri="{28A0092B-C50C-407E-A947-70E740481C1C}">
                 <a14:useLocalDpi xmlns:a14="http://schemas.microsoft.com/office/drawing/2010/main" val="0"/>
               </a:ext>
               <a:ext uri="{96DAC541-7B7A-43D3-8B79-37D633B846F1}">
-                <asvg:svgBlip xmlns:asvg="http://schemas.microsoft.com/office/drawing/2016/SVG/main" r:embed="rId8"/>
+                <asvg:svgBlip xmlns:asvg="http://schemas.microsoft.com/office/drawing/2016/SVG/main" r:embed="rId7"/>
               </a:ext>
             </a:extLst>
           </a:blip>
@@ -10875,13 +10875,13 @@
           <p:nvPr/>
         </p:nvPicPr>
         <p:blipFill>
-          <a:blip r:embed="rId5">
+          <a:blip>
             <a:extLst>
               <a:ext uri="{28A0092B-C50C-407E-A947-70E740481C1C}">
                 <a14:useLocalDpi xmlns:a14="http://schemas.microsoft.com/office/drawing/2010/main" val="0"/>
               </a:ext>
               <a:ext uri="{96DAC541-7B7A-43D3-8B79-37D633B846F1}">
-                <asvg:svgBlip xmlns:asvg="http://schemas.microsoft.com/office/drawing/2016/SVG/main" r:embed="rId6"/>
+                <asvg:svgBlip xmlns:asvg="http://schemas.microsoft.com/office/drawing/2016/SVG/main" r:embed="rId5"/>
               </a:ext>
             </a:extLst>
           </a:blip>
